--- a/public/fun/pack/pptx/family/가족소개_46_우리부부_새벽시장.pptx
+++ b/public/fun/pack/pptx/family/가족소개_46_우리부부_새벽시장.pptx
@@ -3286,6 +3286,14 @@
 <file path=ppt/slides/slide1.xml><?xml version="1.0" encoding="utf-8"?>
 <p:sld xmlns:a="http://schemas.openxmlformats.org/drawingml/2006/main" xmlns:p="http://schemas.openxmlformats.org/presentationml/2006/main" xmlns:r="http://schemas.openxmlformats.org/officeDocument/2006/relationships">
   <p:cSld>
+    <p:bg>
+      <p:bgPr>
+        <a:solidFill>
+          <a:srgbClr val="D5EEF6"/>
+        </a:solidFill>
+        <a:effectLst/>
+      </p:bgPr>
+    </p:bg>
     <p:spTree>
       <p:nvGrpSpPr>
         <p:cNvPr id="1" name=""/>
@@ -3293,30 +3301,116 @@
         <p:nvPr/>
       </p:nvGrpSpPr>
       <p:grpSpPr/>
-      <p:pic>
-        <p:nvPicPr>
-          <p:cNvPr id="3" name="표지 그림" descr="family-46.jpg"/>
-          <p:cNvPicPr>
-            <a:picLocks noChangeAspect="1"/>
-          </p:cNvPicPr>
-          <p:nvPr/>
-        </p:nvPicPr>
-        <p:blipFill>
-          <a:blip r:embed="rId2"/>
-          <a:stretch>
-            <a:fillRect/>
-          </a:stretch>
-        </p:blipFill>
-        <p:spPr>
-          <a:xfrm>
-            <a:off x="0" y="0"/>
-            <a:ext cx="12191695" cy="6858000"/>
+      <p:sp>
+        <p:nvSpPr>
+          <p:cNvPr id="3" name="사진 자리"/>
+          <p:cNvSpPr/>
+          <p:nvPr/>
+        </p:nvSpPr>
+        <p:spPr>
+          <a:xfrm>
+            <a:off x="7802684" y="0"/>
+            <a:ext cx="4389010" cy="6858000"/>
           </a:xfrm>
           <a:prstGeom prst="rect">
             <a:avLst/>
           </a:prstGeom>
-        </p:spPr>
-      </p:pic>
+          <a:solidFill>
+            <a:srgbClr val="ADDBEB"/>
+          </a:solidFill>
+          <a:ln>
+            <a:noFill/>
+          </a:ln>
+        </p:spPr>
+        <p:txBody>
+          <a:bodyPr rtlCol="0" anchor="ctr" wrap="square" lIns="54864" rIns="54864" tIns="27432" bIns="27432">
+            <a:noAutofit/>
+          </a:bodyPr>
+          <a:lstStyle/>
+          <a:p>
+            <a:pPr algn="ctr">
+              <a:lnSpc>
+                <a:spcPct val="100000"/>
+              </a:lnSpc>
+            </a:pPr>
+            <a:r>
+              <a:rPr sz="1400" b="0" i="0">
+                <a:solidFill>
+                  <a:srgbClr val="274149"/>
+                </a:solidFill>
+              </a:rPr>
+              <a:t>사진을 넣어 주세요</a:t>
+            </a:r>
+          </a:p>
+        </p:txBody>
+      </p:sp>
+      <p:sp>
+        <p:nvSpPr>
+          <p:cNvPr id="4" name="장식"/>
+          <p:cNvSpPr/>
+          <p:nvPr/>
+        </p:nvSpPr>
+        <p:spPr>
+          <a:xfrm>
+            <a:off x="8168435" y="365760"/>
+            <a:ext cx="3657508" cy="6126480"/>
+          </a:xfrm>
+          <a:prstGeom prst="rect">
+            <a:avLst/>
+          </a:prstGeom>
+          <a:noFill/>
+          <a:ln w="9525">
+            <a:solidFill>
+              <a:srgbClr val="26231F"/>
+            </a:solidFill>
+          </a:ln>
+        </p:spPr>
+        <p:txBody>
+          <a:bodyPr rtlCol="0" anchor="ctr"/>
+          <a:lstStyle/>
+          <a:p>
+            <a:pPr algn="ctr"/>
+          </a:p>
+        </p:txBody>
+      </p:sp>
+      <p:sp>
+        <p:nvSpPr>
+          <p:cNvPr id="5" name="라벨"/>
+          <p:cNvSpPr txBox="1"/>
+          <p:nvPr/>
+        </p:nvSpPr>
+        <p:spPr>
+          <a:xfrm>
+            <a:off x="822960" y="2148840"/>
+            <a:ext cx="5608179" cy="274320"/>
+          </a:xfrm>
+          <a:prstGeom prst="rect">
+            <a:avLst/>
+          </a:prstGeom>
+          <a:noFill/>
+        </p:spPr>
+        <p:txBody>
+          <a:bodyPr wrap="square" lIns="54864" rIns="54864" tIns="27432" bIns="27432" anchor="t">
+            <a:noAutofit/>
+          </a:bodyPr>
+          <a:lstStyle/>
+          <a:p>
+            <a:pPr algn="l">
+              <a:lnSpc>
+                <a:spcPct val="115000"/>
+              </a:lnSpc>
+            </a:pPr>
+            <a:r>
+              <a:rPr sz="1000" b="1" i="0" spc="250">
+                <a:solidFill>
+                  <a:srgbClr val="26231F"/>
+                </a:solidFill>
+              </a:rPr>
+              <a:t>FAMILY ALBUM</a:t>
+            </a:r>
+          </a:p>
+        </p:txBody>
+      </p:sp>
       <p:sp>
         <p:nvSpPr>
           <p:cNvPr id="2" name="Title 1"/>
@@ -3329,8 +3423,8 @@
         </p:nvSpPr>
         <p:spPr>
           <a:xfrm>
-            <a:off x="853418" y="2057400"/>
-            <a:ext cx="6095847" cy="1554480"/>
+            <a:off x="822960" y="2606040"/>
+            <a:ext cx="5608179" cy="1188720"/>
           </a:xfrm>
         </p:spPr>
         <p:txBody>
@@ -3345,9 +3439,9 @@
               </a:lnSpc>
             </a:pPr>
             <a:r>
-              <a:rPr sz="3600" b="1" i="0">
-                <a:solidFill>
-                  <a:srgbClr val="253A41"/>
+              <a:rPr sz="4000" b="1" i="0">
+                <a:solidFill>
+                  <a:srgbClr val="26231F"/>
                 </a:solidFill>
               </a:rPr>
               <a:t>우리 가족을 소개합니다</a:t>
@@ -3357,14 +3451,14 @@
       </p:sp>
       <p:sp>
         <p:nvSpPr>
-          <p:cNvPr id="4" name="한 줄 문구"/>
+          <p:cNvPr id="6" name="한 줄 문구"/>
           <p:cNvSpPr txBox="1"/>
           <p:nvPr/>
         </p:nvSpPr>
         <p:spPr>
           <a:xfrm>
-            <a:off x="853418" y="3749039"/>
-            <a:ext cx="6095847" cy="822960"/>
+            <a:off x="822960" y="3886200"/>
+            <a:ext cx="5608179" cy="822960"/>
           </a:xfrm>
           <a:prstGeom prst="rect">
             <a:avLst/>
@@ -3383,9 +3477,9 @@
               </a:lnSpc>
             </a:pPr>
             <a:r>
-              <a:rPr sz="1700" b="0" i="1">
-                <a:solidFill>
-                  <a:srgbClr val="253A41"/>
+              <a:rPr sz="1700" b="0" i="0">
+                <a:solidFill>
+                  <a:srgbClr val="26231F"/>
                 </a:solidFill>
               </a:rPr>
               <a:t>새벽 시장에 장 보러 나선 아침</a:t>
@@ -3395,14 +3489,14 @@
       </p:sp>
       <p:sp>
         <p:nvSpPr>
-          <p:cNvPr id="5" name="안내 문구"/>
+          <p:cNvPr id="7" name="안내 문구"/>
           <p:cNvSpPr txBox="1"/>
           <p:nvPr/>
         </p:nvSpPr>
         <p:spPr>
           <a:xfrm>
-            <a:off x="853418" y="4617720"/>
-            <a:ext cx="6095847" cy="914400"/>
+            <a:off x="822960" y="4754880"/>
+            <a:ext cx="5608179" cy="914400"/>
           </a:xfrm>
           <a:prstGeom prst="rect">
             <a:avLst/>
@@ -3423,10 +3517,10 @@
             <a:r>
               <a:rPr sz="1400" b="0" i="0">
                 <a:solidFill>
-                  <a:srgbClr val="666666"/>
+                  <a:srgbClr val="26231F"/>
                 </a:solidFill>
               </a:rPr>
-              <a:t>우리 부부 · 2027. 00. 00</a:t>
+              <a:t>우리 부부 · 날짜 입력</a:t>
             </a:r>
           </a:p>
         </p:txBody>
@@ -3465,14 +3559,14 @@
         </p:nvSpPr>
         <p:spPr>
           <a:xfrm>
-            <a:off x="0" y="384048"/>
-            <a:ext cx="9509522" cy="896112"/>
-          </a:xfrm>
-          <a:prstGeom prst="homePlate">
+            <a:off x="0" y="6565392"/>
+            <a:ext cx="12191695" cy="292608"/>
+          </a:xfrm>
+          <a:prstGeom prst="rect">
             <a:avLst/>
           </a:prstGeom>
           <a:solidFill>
-            <a:srgbClr val="497483"/>
+            <a:srgbClr val="ADDBEB"/>
           </a:solidFill>
           <a:ln>
             <a:noFill/>
@@ -3488,19 +3582,77 @@
       </p:sp>
       <p:sp>
         <p:nvSpPr>
-          <p:cNvPr id="2" name="Title 1"/>
-          <p:cNvSpPr>
-            <a:spLocks noGrp="1"/>
-          </p:cNvSpPr>
-          <p:nvPr>
-            <p:ph type="title"/>
-          </p:nvPr>
-        </p:nvSpPr>
-        <p:spPr>
-          <a:xfrm>
-            <a:off x="640080" y="411480"/>
-            <a:ext cx="8412242" cy="822960"/>
-          </a:xfrm>
+          <p:cNvPr id="4" name="포인트"/>
+          <p:cNvSpPr/>
+          <p:nvPr/>
+        </p:nvSpPr>
+        <p:spPr>
+          <a:xfrm>
+            <a:off x="5958687" y="246888"/>
+            <a:ext cx="274320" cy="274320"/>
+          </a:xfrm>
+          <a:prstGeom prst="round2SameRect">
+            <a:avLst/>
+          </a:prstGeom>
+          <a:solidFill>
+            <a:srgbClr val="98CFE1"/>
+          </a:solidFill>
+          <a:ln>
+            <a:noFill/>
+          </a:ln>
+        </p:spPr>
+        <p:txBody>
+          <a:bodyPr rtlCol="0" anchor="ctr"/>
+          <a:lstStyle/>
+          <a:p>
+            <a:pPr algn="ctr"/>
+          </a:p>
+        </p:txBody>
+      </p:sp>
+      <p:sp>
+        <p:nvSpPr>
+          <p:cNvPr id="5" name="장식"/>
+          <p:cNvSpPr/>
+          <p:nvPr/>
+        </p:nvSpPr>
+        <p:spPr>
+          <a:xfrm>
+            <a:off x="5684367" y="1572768"/>
+            <a:ext cx="822960" cy="22860"/>
+          </a:xfrm>
+          <a:prstGeom prst="rect">
+            <a:avLst/>
+          </a:prstGeom>
+          <a:solidFill>
+            <a:srgbClr val="98CFE1"/>
+          </a:solidFill>
+          <a:ln>
+            <a:noFill/>
+          </a:ln>
+        </p:spPr>
+        <p:txBody>
+          <a:bodyPr rtlCol="0" anchor="ctr"/>
+          <a:lstStyle/>
+          <a:p>
+            <a:pPr algn="ctr"/>
+          </a:p>
+        </p:txBody>
+      </p:sp>
+      <p:sp>
+        <p:nvSpPr>
+          <p:cNvPr id="6" name="상단 라벨"/>
+          <p:cNvSpPr txBox="1"/>
+          <p:nvPr/>
+        </p:nvSpPr>
+        <p:spPr>
+          <a:xfrm>
+            <a:off x="640080" y="182880"/>
+            <a:ext cx="3657600" cy="274320"/>
+          </a:xfrm>
+          <a:prstGeom prst="rect">
+            <a:avLst/>
+          </a:prstGeom>
+          <a:noFill/>
         </p:spPr>
         <p:txBody>
           <a:bodyPr wrap="square" lIns="54864" rIns="54864" tIns="27432" bIns="27432" anchor="ctr">
@@ -3509,6 +3661,44 @@
           <a:lstStyle/>
           <a:p>
             <a:pPr algn="l">
+              <a:lnSpc>
+                <a:spcPct val="115000"/>
+              </a:lnSpc>
+            </a:pPr>
+            <a:r>
+              <a:rPr sz="800" b="1" i="0" spc="250">
+                <a:solidFill>
+                  <a:srgbClr val="8E8780"/>
+                </a:solidFill>
+              </a:rPr>
+              <a:t>FAMILY ALBUM</a:t>
+            </a:r>
+          </a:p>
+        </p:txBody>
+      </p:sp>
+      <p:sp>
+        <p:nvSpPr>
+          <p:cNvPr id="2" name="Title 1"/>
+          <p:cNvSpPr>
+            <a:spLocks noGrp="1"/>
+          </p:cNvSpPr>
+          <p:nvPr>
+            <p:ph type="title"/>
+          </p:nvPr>
+        </p:nvSpPr>
+        <p:spPr>
+          <a:xfrm>
+            <a:off x="1371600" y="640080"/>
+            <a:ext cx="9448495" cy="868680"/>
+          </a:xfrm>
+        </p:spPr>
+        <p:txBody>
+          <a:bodyPr wrap="square" lIns="54864" rIns="54864" tIns="27432" bIns="27432" anchor="ctr">
+            <a:noAutofit/>
+          </a:bodyPr>
+          <a:lstStyle/>
+          <a:p>
+            <a:pPr algn="ctr">
               <a:lnSpc>
                 <a:spcPct val="105000"/>
               </a:lnSpc>
@@ -3516,7 +3706,7 @@
             <a:r>
               <a:rPr sz="3000" b="1" i="0">
                 <a:solidFill>
-                  <a:srgbClr val="FFFFFF"/>
+                  <a:srgbClr val="26231F"/>
                 </a:solidFill>
               </a:rPr>
               <a:t>가족 구성원</a:t>
@@ -3526,25 +3716,23 @@
       </p:sp>
       <p:sp>
         <p:nvSpPr>
-          <p:cNvPr id="4" name="사진 자리"/>
+          <p:cNvPr id="7" name="사진 자리"/>
           <p:cNvSpPr/>
           <p:nvPr/>
         </p:nvSpPr>
         <p:spPr>
           <a:xfrm>
-            <a:off x="2122093" y="1645920"/>
-            <a:ext cx="2377440" cy="2377440"/>
+            <a:off x="2213533" y="1783080"/>
+            <a:ext cx="2194560" cy="2194560"/>
           </a:xfrm>
           <a:prstGeom prst="ellipse">
             <a:avLst/>
           </a:prstGeom>
           <a:solidFill>
-            <a:srgbClr val="D6E5EA"/>
+            <a:srgbClr val="D5EEF6"/>
           </a:solidFill>
           <a:ln w="19050">
-            <a:solidFill>
-              <a:srgbClr val="497483"/>
-            </a:solidFill>
+            <a:noFill/>
             <a:prstDash val="dash"/>
           </a:ln>
         </p:spPr>
@@ -3562,7 +3750,7 @@
             <a:r>
               <a:rPr sz="1200" b="0" i="0">
                 <a:solidFill>
-                  <a:srgbClr val="253A41"/>
+                  <a:srgbClr val="8E8780"/>
                 </a:solidFill>
               </a:rPr>
               <a:t>사진</a:t>
@@ -3572,13 +3760,13 @@
       </p:sp>
       <p:sp>
         <p:nvSpPr>
-          <p:cNvPr id="5" name="TextBox 4"/>
+          <p:cNvPr id="8" name="TextBox 7"/>
           <p:cNvSpPr txBox="1"/>
           <p:nvPr/>
         </p:nvSpPr>
         <p:spPr>
           <a:xfrm>
-            <a:off x="640080" y="4114800"/>
+            <a:off x="640080" y="4069079"/>
             <a:ext cx="5341467" cy="411480"/>
           </a:xfrm>
           <a:prstGeom prst="rect">
@@ -3600,7 +3788,7 @@
             <a:r>
               <a:rPr sz="1600" b="1" i="0">
                 <a:solidFill>
-                  <a:srgbClr val="253A41"/>
+                  <a:srgbClr val="274149"/>
                 </a:solidFill>
               </a:rPr>
               <a:t>남편</a:t>
@@ -3610,14 +3798,14 @@
       </p:sp>
       <p:sp>
         <p:nvSpPr>
-          <p:cNvPr id="6" name="TextBox 5"/>
+          <p:cNvPr id="9" name="TextBox 8"/>
           <p:cNvSpPr txBox="1"/>
           <p:nvPr/>
         </p:nvSpPr>
         <p:spPr>
           <a:xfrm>
-            <a:off x="731519" y="4572000"/>
-            <a:ext cx="5158587" cy="1828800"/>
+            <a:off x="731519" y="4526279"/>
+            <a:ext cx="5158587" cy="1645919"/>
           </a:xfrm>
           <a:prstGeom prst="rect">
             <a:avLst/>
@@ -3678,25 +3866,23 @@
       </p:sp>
       <p:sp>
         <p:nvSpPr>
-          <p:cNvPr id="7" name="사진 자리"/>
+          <p:cNvPr id="10" name="사진 자리"/>
           <p:cNvSpPr/>
           <p:nvPr/>
         </p:nvSpPr>
         <p:spPr>
           <a:xfrm>
-            <a:off x="7692161" y="1645920"/>
-            <a:ext cx="2377440" cy="2377440"/>
+            <a:off x="7783601" y="1783080"/>
+            <a:ext cx="2194560" cy="2194560"/>
           </a:xfrm>
           <a:prstGeom prst="ellipse">
             <a:avLst/>
           </a:prstGeom>
           <a:solidFill>
-            <a:srgbClr val="D6E5EA"/>
+            <a:srgbClr val="D5EEF6"/>
           </a:solidFill>
           <a:ln w="19050">
-            <a:solidFill>
-              <a:srgbClr val="497483"/>
-            </a:solidFill>
+            <a:noFill/>
             <a:prstDash val="dash"/>
           </a:ln>
         </p:spPr>
@@ -3714,7 +3900,7 @@
             <a:r>
               <a:rPr sz="1200" b="0" i="0">
                 <a:solidFill>
-                  <a:srgbClr val="253A41"/>
+                  <a:srgbClr val="8E8780"/>
                 </a:solidFill>
               </a:rPr>
               <a:t>사진</a:t>
@@ -3724,13 +3910,13 @@
       </p:sp>
       <p:sp>
         <p:nvSpPr>
-          <p:cNvPr id="8" name="TextBox 7"/>
+          <p:cNvPr id="11" name="TextBox 10"/>
           <p:cNvSpPr txBox="1"/>
           <p:nvPr/>
         </p:nvSpPr>
         <p:spPr>
           <a:xfrm>
-            <a:off x="6210147" y="4114800"/>
+            <a:off x="6210147" y="4069079"/>
             <a:ext cx="5341467" cy="411480"/>
           </a:xfrm>
           <a:prstGeom prst="rect">
@@ -3752,7 +3938,7 @@
             <a:r>
               <a:rPr sz="1600" b="1" i="0">
                 <a:solidFill>
-                  <a:srgbClr val="253A41"/>
+                  <a:srgbClr val="274149"/>
                 </a:solidFill>
               </a:rPr>
               <a:t>아내</a:t>
@@ -3762,14 +3948,14 @@
       </p:sp>
       <p:sp>
         <p:nvSpPr>
-          <p:cNvPr id="9" name="TextBox 8"/>
+          <p:cNvPr id="12" name="TextBox 11"/>
           <p:cNvSpPr txBox="1"/>
           <p:nvPr/>
         </p:nvSpPr>
         <p:spPr>
           <a:xfrm>
-            <a:off x="6301587" y="4572000"/>
-            <a:ext cx="5158587" cy="1828800"/>
+            <a:off x="6301587" y="4526279"/>
+            <a:ext cx="5158587" cy="1645919"/>
           </a:xfrm>
           <a:prstGeom prst="rect">
             <a:avLst/>
@@ -3862,14 +4048,14 @@
         </p:nvSpPr>
         <p:spPr>
           <a:xfrm>
-            <a:off x="0" y="384048"/>
-            <a:ext cx="9509522" cy="896112"/>
-          </a:xfrm>
-          <a:prstGeom prst="homePlate">
+            <a:off x="0" y="6565392"/>
+            <a:ext cx="12191695" cy="292608"/>
+          </a:xfrm>
+          <a:prstGeom prst="rect">
             <a:avLst/>
           </a:prstGeom>
           <a:solidFill>
-            <a:srgbClr val="497483"/>
+            <a:srgbClr val="ADDBEB"/>
           </a:solidFill>
           <a:ln>
             <a:noFill/>
@@ -3885,19 +4071,77 @@
       </p:sp>
       <p:sp>
         <p:nvSpPr>
-          <p:cNvPr id="2" name="Title 1"/>
-          <p:cNvSpPr>
-            <a:spLocks noGrp="1"/>
-          </p:cNvSpPr>
-          <p:nvPr>
-            <p:ph type="title"/>
-          </p:nvPr>
-        </p:nvSpPr>
-        <p:spPr>
-          <a:xfrm>
-            <a:off x="640080" y="411480"/>
-            <a:ext cx="8412242" cy="822960"/>
-          </a:xfrm>
+          <p:cNvPr id="4" name="포인트"/>
+          <p:cNvSpPr/>
+          <p:nvPr/>
+        </p:nvSpPr>
+        <p:spPr>
+          <a:xfrm>
+            <a:off x="5958687" y="246888"/>
+            <a:ext cx="274320" cy="274320"/>
+          </a:xfrm>
+          <a:prstGeom prst="round2SameRect">
+            <a:avLst/>
+          </a:prstGeom>
+          <a:solidFill>
+            <a:srgbClr val="98CFE1"/>
+          </a:solidFill>
+          <a:ln>
+            <a:noFill/>
+          </a:ln>
+        </p:spPr>
+        <p:txBody>
+          <a:bodyPr rtlCol="0" anchor="ctr"/>
+          <a:lstStyle/>
+          <a:p>
+            <a:pPr algn="ctr"/>
+          </a:p>
+        </p:txBody>
+      </p:sp>
+      <p:sp>
+        <p:nvSpPr>
+          <p:cNvPr id="5" name="장식"/>
+          <p:cNvSpPr/>
+          <p:nvPr/>
+        </p:nvSpPr>
+        <p:spPr>
+          <a:xfrm>
+            <a:off x="5684367" y="1572768"/>
+            <a:ext cx="822960" cy="22860"/>
+          </a:xfrm>
+          <a:prstGeom prst="rect">
+            <a:avLst/>
+          </a:prstGeom>
+          <a:solidFill>
+            <a:srgbClr val="98CFE1"/>
+          </a:solidFill>
+          <a:ln>
+            <a:noFill/>
+          </a:ln>
+        </p:spPr>
+        <p:txBody>
+          <a:bodyPr rtlCol="0" anchor="ctr"/>
+          <a:lstStyle/>
+          <a:p>
+            <a:pPr algn="ctr"/>
+          </a:p>
+        </p:txBody>
+      </p:sp>
+      <p:sp>
+        <p:nvSpPr>
+          <p:cNvPr id="6" name="상단 라벨"/>
+          <p:cNvSpPr txBox="1"/>
+          <p:nvPr/>
+        </p:nvSpPr>
+        <p:spPr>
+          <a:xfrm>
+            <a:off x="640080" y="182880"/>
+            <a:ext cx="3657600" cy="274320"/>
+          </a:xfrm>
+          <a:prstGeom prst="rect">
+            <a:avLst/>
+          </a:prstGeom>
+          <a:noFill/>
         </p:spPr>
         <p:txBody>
           <a:bodyPr wrap="square" lIns="54864" rIns="54864" tIns="27432" bIns="27432" anchor="ctr">
@@ -3906,6 +4150,44 @@
           <a:lstStyle/>
           <a:p>
             <a:pPr algn="l">
+              <a:lnSpc>
+                <a:spcPct val="115000"/>
+              </a:lnSpc>
+            </a:pPr>
+            <a:r>
+              <a:rPr sz="800" b="1" i="0" spc="250">
+                <a:solidFill>
+                  <a:srgbClr val="8E8780"/>
+                </a:solidFill>
+              </a:rPr>
+              <a:t>FAMILY ALBUM</a:t>
+            </a:r>
+          </a:p>
+        </p:txBody>
+      </p:sp>
+      <p:sp>
+        <p:nvSpPr>
+          <p:cNvPr id="2" name="Title 1"/>
+          <p:cNvSpPr>
+            <a:spLocks noGrp="1"/>
+          </p:cNvSpPr>
+          <p:nvPr>
+            <p:ph type="title"/>
+          </p:nvPr>
+        </p:nvSpPr>
+        <p:spPr>
+          <a:xfrm>
+            <a:off x="1371600" y="640080"/>
+            <a:ext cx="9448495" cy="868680"/>
+          </a:xfrm>
+        </p:spPr>
+        <p:txBody>
+          <a:bodyPr wrap="square" lIns="54864" rIns="54864" tIns="27432" bIns="27432" anchor="ctr">
+            <a:noAutofit/>
+          </a:bodyPr>
+          <a:lstStyle/>
+          <a:p>
+            <a:pPr algn="ctr">
               <a:lnSpc>
                 <a:spcPct val="105000"/>
               </a:lnSpc>
@@ -3913,7 +4195,7 @@
             <a:r>
               <a:rPr sz="3000" b="1" i="0">
                 <a:solidFill>
-                  <a:srgbClr val="FFFFFF"/>
+                  <a:srgbClr val="26231F"/>
                 </a:solidFill>
               </a:rPr>
               <a:t>우리 가족 이야기</a:t>
@@ -3923,20 +4205,20 @@
       </p:sp>
       <p:sp>
         <p:nvSpPr>
-          <p:cNvPr id="4" name="타임라인 선"/>
+          <p:cNvPr id="7" name="타임라인 선"/>
           <p:cNvSpPr/>
           <p:nvPr/>
         </p:nvSpPr>
         <p:spPr>
           <a:xfrm>
-            <a:off x="640080" y="3383280"/>
+            <a:off x="640080" y="3520440"/>
             <a:ext cx="10911535" cy="54864"/>
           </a:xfrm>
           <a:prstGeom prst="rect">
             <a:avLst/>
           </a:prstGeom>
           <a:solidFill>
-            <a:srgbClr val="D6E5EA"/>
+            <a:srgbClr val="D5EEF6"/>
           </a:solidFill>
           <a:ln>
             <a:noFill/>
@@ -3952,20 +4234,20 @@
       </p:sp>
       <p:sp>
         <p:nvSpPr>
-          <p:cNvPr id="5" name="때 1"/>
+          <p:cNvPr id="8" name="때 1"/>
           <p:cNvSpPr/>
           <p:nvPr/>
         </p:nvSpPr>
         <p:spPr>
           <a:xfrm>
-            <a:off x="1802853" y="3200400"/>
+            <a:off x="1802853" y="3337560"/>
             <a:ext cx="402336" cy="402336"/>
           </a:xfrm>
           <a:prstGeom prst="ellipse">
             <a:avLst/>
           </a:prstGeom>
           <a:solidFill>
-            <a:srgbClr val="497483"/>
+            <a:srgbClr val="98CFE1"/>
           </a:solidFill>
           <a:ln w="38100">
             <a:solidFill>
@@ -3983,13 +4265,13 @@
       </p:sp>
       <p:sp>
         <p:nvSpPr>
-          <p:cNvPr id="6" name="TextBox 5"/>
+          <p:cNvPr id="9" name="TextBox 8"/>
           <p:cNvSpPr txBox="1"/>
           <p:nvPr/>
         </p:nvSpPr>
         <p:spPr>
           <a:xfrm>
-            <a:off x="685800" y="2560320"/>
+            <a:off x="685800" y="2697480"/>
             <a:ext cx="2636443" cy="457200"/>
           </a:xfrm>
           <a:prstGeom prst="rect">
@@ -4011,7 +4293,7 @@
             <a:r>
               <a:rPr sz="1600" b="1" i="0">
                 <a:solidFill>
-                  <a:srgbClr val="497483"/>
+                  <a:srgbClr val="98CFE1"/>
                 </a:solidFill>
               </a:rPr>
               <a:t>처음 만난 날</a:t>
@@ -4021,13 +4303,13 @@
       </p:sp>
       <p:sp>
         <p:nvSpPr>
-          <p:cNvPr id="7" name="TextBox 6"/>
+          <p:cNvPr id="10" name="TextBox 9"/>
           <p:cNvSpPr txBox="1"/>
           <p:nvPr/>
         </p:nvSpPr>
         <p:spPr>
           <a:xfrm>
-            <a:off x="731519" y="3749039"/>
+            <a:off x="731519" y="3886200"/>
             <a:ext cx="2545003" cy="457200"/>
           </a:xfrm>
           <a:prstGeom prst="rect">
@@ -4049,7 +4331,7 @@
             <a:r>
               <a:rPr sz="1800" b="1" i="0">
                 <a:solidFill>
-                  <a:srgbClr val="253A41"/>
+                  <a:srgbClr val="274149"/>
                 </a:solidFill>
               </a:rPr>
               <a:t>첫 만남</a:t>
@@ -4059,13 +4341,13 @@
       </p:sp>
       <p:sp>
         <p:nvSpPr>
-          <p:cNvPr id="8" name="TextBox 7"/>
+          <p:cNvPr id="11" name="TextBox 10"/>
           <p:cNvSpPr txBox="1"/>
           <p:nvPr/>
         </p:nvSpPr>
         <p:spPr>
           <a:xfrm>
-            <a:off x="731519" y="4251960"/>
+            <a:off x="731519" y="4389120"/>
             <a:ext cx="2545003" cy="1645920"/>
           </a:xfrm>
           <a:prstGeom prst="rect">
@@ -4087,7 +4369,7 @@
             <a:r>
               <a:rPr sz="1500" b="0" i="0">
                 <a:solidFill>
-                  <a:srgbClr val="2B2B2B"/>
+                  <a:srgbClr val="26231F"/>
                 </a:solidFill>
               </a:rPr>
               <a:t>어디에서 어떻게 만났나요?</a:t>
@@ -4097,20 +4379,20 @@
       </p:sp>
       <p:sp>
         <p:nvSpPr>
-          <p:cNvPr id="9" name="때 2"/>
+          <p:cNvPr id="12" name="때 2"/>
           <p:cNvSpPr/>
           <p:nvPr/>
         </p:nvSpPr>
         <p:spPr>
           <a:xfrm>
-            <a:off x="4530737" y="3200400"/>
+            <a:off x="4530737" y="3337560"/>
             <a:ext cx="402336" cy="402336"/>
           </a:xfrm>
           <a:prstGeom prst="ellipse">
             <a:avLst/>
           </a:prstGeom>
           <a:solidFill>
-            <a:srgbClr val="497483"/>
+            <a:srgbClr val="98CFE1"/>
           </a:solidFill>
           <a:ln w="38100">
             <a:solidFill>
@@ -4128,13 +4410,13 @@
       </p:sp>
       <p:sp>
         <p:nvSpPr>
-          <p:cNvPr id="10" name="TextBox 9"/>
+          <p:cNvPr id="13" name="TextBox 12"/>
           <p:cNvSpPr txBox="1"/>
           <p:nvPr/>
         </p:nvSpPr>
         <p:spPr>
           <a:xfrm>
-            <a:off x="3413683" y="2560320"/>
+            <a:off x="3413683" y="2697480"/>
             <a:ext cx="2636443" cy="457200"/>
           </a:xfrm>
           <a:prstGeom prst="rect">
@@ -4156,7 +4438,7 @@
             <a:r>
               <a:rPr sz="1600" b="1" i="0">
                 <a:solidFill>
-                  <a:srgbClr val="497483"/>
+                  <a:srgbClr val="98CFE1"/>
                 </a:solidFill>
               </a:rPr>
               <a:t>결혼</a:t>
@@ -4166,13 +4448,13 @@
       </p:sp>
       <p:sp>
         <p:nvSpPr>
-          <p:cNvPr id="11" name="TextBox 10"/>
+          <p:cNvPr id="14" name="TextBox 13"/>
           <p:cNvSpPr txBox="1"/>
           <p:nvPr/>
         </p:nvSpPr>
         <p:spPr>
           <a:xfrm>
-            <a:off x="3459403" y="3749039"/>
+            <a:off x="3459403" y="3886200"/>
             <a:ext cx="2545003" cy="457200"/>
           </a:xfrm>
           <a:prstGeom prst="rect">
@@ -4194,7 +4476,7 @@
             <a:r>
               <a:rPr sz="1800" b="1" i="0">
                 <a:solidFill>
-                  <a:srgbClr val="253A41"/>
+                  <a:srgbClr val="274149"/>
                 </a:solidFill>
               </a:rPr>
               <a:t>함께 시작한 날</a:t>
@@ -4204,13 +4486,13 @@
       </p:sp>
       <p:sp>
         <p:nvSpPr>
-          <p:cNvPr id="12" name="TextBox 11"/>
+          <p:cNvPr id="15" name="TextBox 14"/>
           <p:cNvSpPr txBox="1"/>
           <p:nvPr/>
         </p:nvSpPr>
         <p:spPr>
           <a:xfrm>
-            <a:off x="3459403" y="4251960"/>
+            <a:off x="3459403" y="4389120"/>
             <a:ext cx="2545003" cy="1645920"/>
           </a:xfrm>
           <a:prstGeom prst="rect">
@@ -4232,7 +4514,7 @@
             <a:r>
               <a:rPr sz="1500" b="0" i="0">
                 <a:solidFill>
-                  <a:srgbClr val="2B2B2B"/>
+                  <a:srgbClr val="26231F"/>
                 </a:solidFill>
               </a:rPr>
               <a:t>그날의 기억을 적어요</a:t>
@@ -4242,20 +4524,20 @@
       </p:sp>
       <p:sp>
         <p:nvSpPr>
-          <p:cNvPr id="13" name="때 3"/>
+          <p:cNvPr id="16" name="때 3"/>
           <p:cNvSpPr/>
           <p:nvPr/>
         </p:nvSpPr>
         <p:spPr>
           <a:xfrm>
-            <a:off x="7258621" y="3200400"/>
+            <a:off x="7258621" y="3337560"/>
             <a:ext cx="402336" cy="402336"/>
           </a:xfrm>
           <a:prstGeom prst="ellipse">
             <a:avLst/>
           </a:prstGeom>
           <a:solidFill>
-            <a:srgbClr val="497483"/>
+            <a:srgbClr val="98CFE1"/>
           </a:solidFill>
           <a:ln w="38100">
             <a:solidFill>
@@ -4273,13 +4555,13 @@
       </p:sp>
       <p:sp>
         <p:nvSpPr>
-          <p:cNvPr id="14" name="TextBox 13"/>
+          <p:cNvPr id="17" name="TextBox 16"/>
           <p:cNvSpPr txBox="1"/>
           <p:nvPr/>
         </p:nvSpPr>
         <p:spPr>
           <a:xfrm>
-            <a:off x="6141567" y="2560320"/>
+            <a:off x="6141567" y="2697480"/>
             <a:ext cx="2636443" cy="457200"/>
           </a:xfrm>
           <a:prstGeom prst="rect">
@@ -4301,7 +4583,7 @@
             <a:r>
               <a:rPr sz="1600" b="1" i="0">
                 <a:solidFill>
-                  <a:srgbClr val="497483"/>
+                  <a:srgbClr val="98CFE1"/>
                 </a:solidFill>
               </a:rPr>
               <a:t>첫 집</a:t>
@@ -4311,13 +4593,13 @@
       </p:sp>
       <p:sp>
         <p:nvSpPr>
-          <p:cNvPr id="15" name="TextBox 14"/>
+          <p:cNvPr id="18" name="TextBox 17"/>
           <p:cNvSpPr txBox="1"/>
           <p:nvPr/>
         </p:nvSpPr>
         <p:spPr>
           <a:xfrm>
-            <a:off x="6187287" y="3749039"/>
+            <a:off x="6187287" y="3886200"/>
             <a:ext cx="2545003" cy="457200"/>
           </a:xfrm>
           <a:prstGeom prst="rect">
@@ -4339,7 +4621,7 @@
             <a:r>
               <a:rPr sz="1800" b="1" i="0">
                 <a:solidFill>
-                  <a:srgbClr val="253A41"/>
+                  <a:srgbClr val="274149"/>
                 </a:solidFill>
               </a:rPr>
               <a:t>우리의 보금자리</a:t>
@@ -4349,13 +4631,13 @@
       </p:sp>
       <p:sp>
         <p:nvSpPr>
-          <p:cNvPr id="16" name="TextBox 15"/>
+          <p:cNvPr id="19" name="TextBox 18"/>
           <p:cNvSpPr txBox="1"/>
           <p:nvPr/>
         </p:nvSpPr>
         <p:spPr>
           <a:xfrm>
-            <a:off x="6187287" y="4251960"/>
+            <a:off x="6187287" y="4389120"/>
             <a:ext cx="2545003" cy="1645920"/>
           </a:xfrm>
           <a:prstGeom prst="rect">
@@ -4377,7 +4659,7 @@
             <a:r>
               <a:rPr sz="1500" b="0" i="0">
                 <a:solidFill>
-                  <a:srgbClr val="2B2B2B"/>
+                  <a:srgbClr val="26231F"/>
                 </a:solidFill>
               </a:rPr>
               <a:t>처음 이사한 날</a:t>
@@ -4387,20 +4669,20 @@
       </p:sp>
       <p:sp>
         <p:nvSpPr>
-          <p:cNvPr id="17" name="때 4"/>
+          <p:cNvPr id="20" name="때 4"/>
           <p:cNvSpPr/>
           <p:nvPr/>
         </p:nvSpPr>
         <p:spPr>
           <a:xfrm>
-            <a:off x="9986505" y="3200400"/>
+            <a:off x="9986505" y="3337560"/>
             <a:ext cx="402336" cy="402336"/>
           </a:xfrm>
           <a:prstGeom prst="ellipse">
             <a:avLst/>
           </a:prstGeom>
           <a:solidFill>
-            <a:srgbClr val="497483"/>
+            <a:srgbClr val="98CFE1"/>
           </a:solidFill>
           <a:ln w="38100">
             <a:solidFill>
@@ -4418,13 +4700,13 @@
       </p:sp>
       <p:sp>
         <p:nvSpPr>
-          <p:cNvPr id="18" name="TextBox 17"/>
+          <p:cNvPr id="21" name="TextBox 20"/>
           <p:cNvSpPr txBox="1"/>
           <p:nvPr/>
         </p:nvSpPr>
         <p:spPr>
           <a:xfrm>
-            <a:off x="8869451" y="2560320"/>
+            <a:off x="8869451" y="2697480"/>
             <a:ext cx="2636443" cy="457200"/>
           </a:xfrm>
           <a:prstGeom prst="rect">
@@ -4446,7 +4728,7 @@
             <a:r>
               <a:rPr sz="1600" b="1" i="0">
                 <a:solidFill>
-                  <a:srgbClr val="497483"/>
+                  <a:srgbClr val="98CFE1"/>
                 </a:solidFill>
               </a:rPr>
               <a:t>지금</a:t>
@@ -4456,13 +4738,13 @@
       </p:sp>
       <p:sp>
         <p:nvSpPr>
-          <p:cNvPr id="19" name="TextBox 18"/>
+          <p:cNvPr id="22" name="TextBox 21"/>
           <p:cNvSpPr txBox="1"/>
           <p:nvPr/>
         </p:nvSpPr>
         <p:spPr>
           <a:xfrm>
-            <a:off x="8915171" y="3749039"/>
+            <a:off x="8915171" y="3886200"/>
             <a:ext cx="2545003" cy="457200"/>
           </a:xfrm>
           <a:prstGeom prst="rect">
@@ -4484,7 +4766,7 @@
             <a:r>
               <a:rPr sz="1800" b="1" i="0">
                 <a:solidFill>
-                  <a:srgbClr val="253A41"/>
+                  <a:srgbClr val="274149"/>
                 </a:solidFill>
               </a:rPr>
               <a:t>오늘의 우리</a:t>
@@ -4494,13 +4776,13 @@
       </p:sp>
       <p:sp>
         <p:nvSpPr>
-          <p:cNvPr id="20" name="TextBox 19"/>
+          <p:cNvPr id="23" name="TextBox 22"/>
           <p:cNvSpPr txBox="1"/>
           <p:nvPr/>
         </p:nvSpPr>
         <p:spPr>
           <a:xfrm>
-            <a:off x="8915171" y="4251960"/>
+            <a:off x="8915171" y="4389120"/>
             <a:ext cx="2545003" cy="1645920"/>
           </a:xfrm>
           <a:prstGeom prst="rect">
@@ -4522,7 +4804,7 @@
             <a:r>
               <a:rPr sz="1500" b="0" i="0">
                 <a:solidFill>
-                  <a:srgbClr val="2B2B2B"/>
+                  <a:srgbClr val="26231F"/>
                 </a:solidFill>
               </a:rPr>
               <a:t>요즘 우리 이야기</a:t>
@@ -4564,14 +4846,14 @@
         </p:nvSpPr>
         <p:spPr>
           <a:xfrm>
-            <a:off x="0" y="384048"/>
-            <a:ext cx="9509522" cy="896112"/>
-          </a:xfrm>
-          <a:prstGeom prst="homePlate">
+            <a:off x="0" y="6565392"/>
+            <a:ext cx="12191695" cy="292608"/>
+          </a:xfrm>
+          <a:prstGeom prst="rect">
             <a:avLst/>
           </a:prstGeom>
           <a:solidFill>
-            <a:srgbClr val="497483"/>
+            <a:srgbClr val="ADDBEB"/>
           </a:solidFill>
           <a:ln>
             <a:noFill/>
@@ -4587,128 +4869,72 @@
       </p:sp>
       <p:sp>
         <p:nvSpPr>
-          <p:cNvPr id="2" name="Title 1"/>
-          <p:cNvSpPr>
-            <a:spLocks noGrp="1"/>
-          </p:cNvSpPr>
-          <p:nvPr>
-            <p:ph type="title"/>
-          </p:nvPr>
-        </p:nvSpPr>
-        <p:spPr>
-          <a:xfrm>
-            <a:off x="640080" y="411480"/>
-            <a:ext cx="8412242" cy="822960"/>
-          </a:xfrm>
-        </p:spPr>
-        <p:txBody>
-          <a:bodyPr wrap="square" lIns="54864" rIns="54864" tIns="27432" bIns="27432" anchor="ctr">
-            <a:noAutofit/>
-          </a:bodyPr>
-          <a:lstStyle/>
-          <a:p>
-            <a:pPr algn="l">
-              <a:lnSpc>
-                <a:spcPct val="105000"/>
-              </a:lnSpc>
-            </a:pPr>
-            <a:r>
-              <a:rPr sz="3000" b="1" i="0">
-                <a:solidFill>
-                  <a:srgbClr val="FFFFFF"/>
-                </a:solidFill>
-              </a:rPr>
-              <a:t>우리 가족의 약속</a:t>
-            </a:r>
-          </a:p>
-        </p:txBody>
-      </p:sp>
-      <p:sp>
-        <p:nvSpPr>
-          <p:cNvPr id="4" name="줄 1"/>
+          <p:cNvPr id="4" name="포인트"/>
           <p:cNvSpPr/>
           <p:nvPr/>
         </p:nvSpPr>
         <p:spPr>
           <a:xfrm>
-            <a:off x="640080" y="1645920"/>
-            <a:ext cx="10911535" cy="1005840"/>
-          </a:xfrm>
-          <a:prstGeom prst="roundRect">
-            <a:avLst>
-              <a:gd name="adj" fmla="val 8000"/>
-            </a:avLst>
+            <a:off x="5958687" y="246888"/>
+            <a:ext cx="274320" cy="274320"/>
+          </a:xfrm>
+          <a:prstGeom prst="round2SameRect">
+            <a:avLst/>
           </a:prstGeom>
           <a:solidFill>
-            <a:srgbClr val="F2F6F8"/>
-          </a:solidFill>
-          <a:ln w="12700">
-            <a:solidFill>
-              <a:srgbClr val="D6E5EA"/>
-            </a:solidFill>
-          </a:ln>
-        </p:spPr>
-        <p:txBody>
-          <a:bodyPr rtlCol="0" anchor="ctr"/>
-          <a:lstStyle/>
-          <a:p>
-            <a:pPr algn="ctr"/>
-          </a:p>
-        </p:txBody>
-      </p:sp>
-      <p:sp>
-        <p:nvSpPr>
-          <p:cNvPr id="5" name="번호 1"/>
-          <p:cNvSpPr/>
-          <p:nvPr/>
-        </p:nvSpPr>
-        <p:spPr>
-          <a:xfrm>
-            <a:off x="822959" y="1920240"/>
-            <a:ext cx="457200" cy="457200"/>
-          </a:xfrm>
-          <a:prstGeom prst="ellipse">
-            <a:avLst/>
-          </a:prstGeom>
-          <a:solidFill>
-            <a:srgbClr val="497483"/>
+            <a:srgbClr val="98CFE1"/>
           </a:solidFill>
           <a:ln>
             <a:noFill/>
           </a:ln>
         </p:spPr>
         <p:txBody>
-          <a:bodyPr rtlCol="0" anchor="ctr" wrap="square" lIns="54864" rIns="54864" tIns="27432" bIns="27432">
-            <a:noAutofit/>
-          </a:bodyPr>
-          <a:lstStyle/>
-          <a:p>
-            <a:pPr algn="ctr">
-              <a:lnSpc>
-                <a:spcPct val="100000"/>
-              </a:lnSpc>
-            </a:pPr>
-            <a:r>
-              <a:rPr sz="1600" b="1" i="0">
-                <a:solidFill>
-                  <a:srgbClr val="FFFFFF"/>
-                </a:solidFill>
-              </a:rPr>
-              <a:t>1</a:t>
-            </a:r>
-          </a:p>
-        </p:txBody>
-      </p:sp>
-      <p:sp>
-        <p:nvSpPr>
-          <p:cNvPr id="6" name="TextBox 5"/>
+          <a:bodyPr rtlCol="0" anchor="ctr"/>
+          <a:lstStyle/>
+          <a:p>
+            <a:pPr algn="ctr"/>
+          </a:p>
+        </p:txBody>
+      </p:sp>
+      <p:sp>
+        <p:nvSpPr>
+          <p:cNvPr id="5" name="장식"/>
+          <p:cNvSpPr/>
+          <p:nvPr/>
+        </p:nvSpPr>
+        <p:spPr>
+          <a:xfrm>
+            <a:off x="5684367" y="1572768"/>
+            <a:ext cx="822960" cy="22860"/>
+          </a:xfrm>
+          <a:prstGeom prst="rect">
+            <a:avLst/>
+          </a:prstGeom>
+          <a:solidFill>
+            <a:srgbClr val="98CFE1"/>
+          </a:solidFill>
+          <a:ln>
+            <a:noFill/>
+          </a:ln>
+        </p:spPr>
+        <p:txBody>
+          <a:bodyPr rtlCol="0" anchor="ctr"/>
+          <a:lstStyle/>
+          <a:p>
+            <a:pPr algn="ctr"/>
+          </a:p>
+        </p:txBody>
+      </p:sp>
+      <p:sp>
+        <p:nvSpPr>
+          <p:cNvPr id="6" name="상단 라벨"/>
           <p:cNvSpPr txBox="1"/>
           <p:nvPr/>
         </p:nvSpPr>
         <p:spPr>
           <a:xfrm>
-            <a:off x="1508760" y="1691640"/>
-            <a:ext cx="2743200" cy="914400"/>
+            <a:off x="640080" y="182880"/>
+            <a:ext cx="3657600" cy="274320"/>
           </a:xfrm>
           <a:prstGeom prst="rect">
             <a:avLst/>
@@ -4727,26 +4953,97 @@
               </a:lnSpc>
             </a:pPr>
             <a:r>
-              <a:rPr sz="1800" b="1" i="0">
-                <a:solidFill>
-                  <a:srgbClr val="253A41"/>
+              <a:rPr sz="800" b="1" i="0" spc="250">
+                <a:solidFill>
+                  <a:srgbClr val="8E8780"/>
                 </a:solidFill>
               </a:rPr>
-              <a:t>약속 1</a:t>
-            </a:r>
-          </a:p>
-        </p:txBody>
-      </p:sp>
-      <p:sp>
-        <p:nvSpPr>
-          <p:cNvPr id="7" name="TextBox 6"/>
+              <a:t>FAMILY ALBUM</a:t>
+            </a:r>
+          </a:p>
+        </p:txBody>
+      </p:sp>
+      <p:sp>
+        <p:nvSpPr>
+          <p:cNvPr id="2" name="Title 1"/>
+          <p:cNvSpPr>
+            <a:spLocks noGrp="1"/>
+          </p:cNvSpPr>
+          <p:nvPr>
+            <p:ph type="title"/>
+          </p:nvPr>
+        </p:nvSpPr>
+        <p:spPr>
+          <a:xfrm>
+            <a:off x="1371600" y="640080"/>
+            <a:ext cx="9448495" cy="868680"/>
+          </a:xfrm>
+        </p:spPr>
+        <p:txBody>
+          <a:bodyPr wrap="square" lIns="54864" rIns="54864" tIns="27432" bIns="27432" anchor="ctr">
+            <a:noAutofit/>
+          </a:bodyPr>
+          <a:lstStyle/>
+          <a:p>
+            <a:pPr algn="ctr">
+              <a:lnSpc>
+                <a:spcPct val="105000"/>
+              </a:lnSpc>
+            </a:pPr>
+            <a:r>
+              <a:rPr sz="3000" b="1" i="0">
+                <a:solidFill>
+                  <a:srgbClr val="26231F"/>
+                </a:solidFill>
+              </a:rPr>
+              <a:t>우리 가족의 약속</a:t>
+            </a:r>
+          </a:p>
+        </p:txBody>
+      </p:sp>
+      <p:sp>
+        <p:nvSpPr>
+          <p:cNvPr id="7" name="줄 1"/>
+          <p:cNvSpPr/>
+          <p:nvPr/>
+        </p:nvSpPr>
+        <p:spPr>
+          <a:xfrm>
+            <a:off x="640080" y="1783080"/>
+            <a:ext cx="10911535" cy="1005840"/>
+          </a:xfrm>
+          <a:prstGeom prst="roundRect">
+            <a:avLst>
+              <a:gd name="adj" fmla="val 7000"/>
+            </a:avLst>
+          </a:prstGeom>
+          <a:solidFill>
+            <a:srgbClr val="FFFFFF"/>
+          </a:solidFill>
+          <a:ln w="12700">
+            <a:solidFill>
+              <a:srgbClr val="ADDBEB"/>
+            </a:solidFill>
+          </a:ln>
+        </p:spPr>
+        <p:txBody>
+          <a:bodyPr rtlCol="0" anchor="ctr"/>
+          <a:lstStyle/>
+          <a:p>
+            <a:pPr algn="ctr"/>
+          </a:p>
+        </p:txBody>
+      </p:sp>
+      <p:sp>
+        <p:nvSpPr>
+          <p:cNvPr id="8" name="번호 1"/>
           <p:cNvSpPr txBox="1"/>
           <p:nvPr/>
         </p:nvSpPr>
         <p:spPr>
           <a:xfrm>
-            <a:off x="4297680" y="1691640"/>
-            <a:ext cx="7071055" cy="914400"/>
+            <a:off x="731519" y="2011680"/>
+            <a:ext cx="914400" cy="548640"/>
           </a:xfrm>
           <a:prstGeom prst="rect">
             <a:avLst/>
@@ -4765,101 +5062,25 @@
               </a:lnSpc>
             </a:pPr>
             <a:r>
-              <a:rPr sz="1700" b="0" i="0">
-                <a:solidFill>
-                  <a:srgbClr val="2B2B2B"/>
+              <a:rPr sz="2400" b="1" i="0">
+                <a:solidFill>
+                  <a:srgbClr val="98CFE1"/>
                 </a:solidFill>
               </a:rPr>
-              <a:t>하루에 한 번 서로 안아 주기</a:t>
-            </a:r>
-          </a:p>
-        </p:txBody>
-      </p:sp>
-      <p:sp>
-        <p:nvSpPr>
-          <p:cNvPr id="8" name="줄 2"/>
-          <p:cNvSpPr/>
-          <p:nvPr/>
-        </p:nvSpPr>
-        <p:spPr>
-          <a:xfrm>
-            <a:off x="640080" y="2788920"/>
-            <a:ext cx="10911535" cy="1005840"/>
-          </a:xfrm>
-          <a:prstGeom prst="roundRect">
-            <a:avLst>
-              <a:gd name="adj" fmla="val 8000"/>
-            </a:avLst>
-          </a:prstGeom>
-          <a:solidFill>
-            <a:srgbClr val="F2F6F8"/>
-          </a:solidFill>
-          <a:ln w="12700">
-            <a:solidFill>
-              <a:srgbClr val="D6E5EA"/>
-            </a:solidFill>
-          </a:ln>
-        </p:spPr>
-        <p:txBody>
-          <a:bodyPr rtlCol="0" anchor="ctr"/>
-          <a:lstStyle/>
-          <a:p>
-            <a:pPr algn="ctr"/>
-          </a:p>
-        </p:txBody>
-      </p:sp>
-      <p:sp>
-        <p:nvSpPr>
-          <p:cNvPr id="9" name="번호 2"/>
-          <p:cNvSpPr/>
-          <p:nvPr/>
-        </p:nvSpPr>
-        <p:spPr>
-          <a:xfrm>
-            <a:off x="822959" y="3063239"/>
-            <a:ext cx="457200" cy="457200"/>
-          </a:xfrm>
-          <a:prstGeom prst="ellipse">
-            <a:avLst/>
-          </a:prstGeom>
-          <a:solidFill>
-            <a:srgbClr val="497483"/>
-          </a:solidFill>
-          <a:ln>
-            <a:noFill/>
-          </a:ln>
-        </p:spPr>
-        <p:txBody>
-          <a:bodyPr rtlCol="0" anchor="ctr" wrap="square" lIns="54864" rIns="54864" tIns="27432" bIns="27432">
-            <a:noAutofit/>
-          </a:bodyPr>
-          <a:lstStyle/>
-          <a:p>
-            <a:pPr algn="ctr">
-              <a:lnSpc>
-                <a:spcPct val="100000"/>
-              </a:lnSpc>
-            </a:pPr>
-            <a:r>
-              <a:rPr sz="1600" b="1" i="0">
-                <a:solidFill>
-                  <a:srgbClr val="FFFFFF"/>
-                </a:solidFill>
-              </a:rPr>
-              <a:t>2</a:t>
-            </a:r>
-          </a:p>
-        </p:txBody>
-      </p:sp>
-      <p:sp>
-        <p:nvSpPr>
-          <p:cNvPr id="10" name="TextBox 9"/>
+              <a:t>01</a:t>
+            </a:r>
+          </a:p>
+        </p:txBody>
+      </p:sp>
+      <p:sp>
+        <p:nvSpPr>
+          <p:cNvPr id="9" name="TextBox 8"/>
           <p:cNvSpPr txBox="1"/>
           <p:nvPr/>
         </p:nvSpPr>
         <p:spPr>
           <a:xfrm>
-            <a:off x="1508760" y="2834639"/>
+            <a:off x="1508760" y="1828800"/>
             <a:ext cx="2743200" cy="914400"/>
           </a:xfrm>
           <a:prstGeom prst="rect">
@@ -4881,23 +5102,23 @@
             <a:r>
               <a:rPr sz="1800" b="1" i="0">
                 <a:solidFill>
-                  <a:srgbClr val="253A41"/>
+                  <a:srgbClr val="274149"/>
                 </a:solidFill>
               </a:rPr>
-              <a:t>약속 2</a:t>
-            </a:r>
-          </a:p>
-        </p:txBody>
-      </p:sp>
-      <p:sp>
-        <p:nvSpPr>
-          <p:cNvPr id="11" name="TextBox 10"/>
+              <a:t>약속 1</a:t>
+            </a:r>
+          </a:p>
+        </p:txBody>
+      </p:sp>
+      <p:sp>
+        <p:nvSpPr>
+          <p:cNvPr id="10" name="TextBox 9"/>
           <p:cNvSpPr txBox="1"/>
           <p:nvPr/>
         </p:nvSpPr>
         <p:spPr>
           <a:xfrm>
-            <a:off x="4297680" y="2834639"/>
+            <a:off x="4297680" y="1828800"/>
             <a:ext cx="7071055" cy="914400"/>
           </a:xfrm>
           <a:prstGeom prst="rect">
@@ -4919,36 +5140,36 @@
             <a:r>
               <a:rPr sz="1700" b="0" i="0">
                 <a:solidFill>
-                  <a:srgbClr val="2B2B2B"/>
+                  <a:srgbClr val="26231F"/>
                 </a:solidFill>
               </a:rPr>
-              <a:t>화가 나도 잠자리 전엔 풀기</a:t>
-            </a:r>
-          </a:p>
-        </p:txBody>
-      </p:sp>
-      <p:sp>
-        <p:nvSpPr>
-          <p:cNvPr id="12" name="줄 3"/>
+              <a:t>하루에 한 번 서로 안아 주기</a:t>
+            </a:r>
+          </a:p>
+        </p:txBody>
+      </p:sp>
+      <p:sp>
+        <p:nvSpPr>
+          <p:cNvPr id="11" name="줄 2"/>
           <p:cNvSpPr/>
           <p:nvPr/>
         </p:nvSpPr>
         <p:spPr>
           <a:xfrm>
-            <a:off x="640080" y="3931920"/>
+            <a:off x="640080" y="2926080"/>
             <a:ext cx="10911535" cy="1005840"/>
           </a:xfrm>
           <a:prstGeom prst="roundRect">
             <a:avLst>
-              <a:gd name="adj" fmla="val 8000"/>
+              <a:gd name="adj" fmla="val 7000"/>
             </a:avLst>
           </a:prstGeom>
           <a:solidFill>
-            <a:srgbClr val="F2F6F8"/>
+            <a:srgbClr val="FFFFFF"/>
           </a:solidFill>
           <a:ln w="12700">
             <a:solidFill>
-              <a:srgbClr val="D6E5EA"/>
+              <a:srgbClr val="ADDBEB"/>
             </a:solidFill>
           </a:ln>
         </p:spPr>
@@ -4962,57 +5183,14 @@
       </p:sp>
       <p:sp>
         <p:nvSpPr>
-          <p:cNvPr id="13" name="번호 3"/>
-          <p:cNvSpPr/>
-          <p:nvPr/>
-        </p:nvSpPr>
-        <p:spPr>
-          <a:xfrm>
-            <a:off x="822959" y="4206240"/>
-            <a:ext cx="457200" cy="457200"/>
-          </a:xfrm>
-          <a:prstGeom prst="ellipse">
-            <a:avLst/>
-          </a:prstGeom>
-          <a:solidFill>
-            <a:srgbClr val="497483"/>
-          </a:solidFill>
-          <a:ln>
-            <a:noFill/>
-          </a:ln>
-        </p:spPr>
-        <p:txBody>
-          <a:bodyPr rtlCol="0" anchor="ctr" wrap="square" lIns="54864" rIns="54864" tIns="27432" bIns="27432">
-            <a:noAutofit/>
-          </a:bodyPr>
-          <a:lstStyle/>
-          <a:p>
-            <a:pPr algn="ctr">
-              <a:lnSpc>
-                <a:spcPct val="100000"/>
-              </a:lnSpc>
-            </a:pPr>
-            <a:r>
-              <a:rPr sz="1600" b="1" i="0">
-                <a:solidFill>
-                  <a:srgbClr val="FFFFFF"/>
-                </a:solidFill>
-              </a:rPr>
-              <a:t>3</a:t>
-            </a:r>
-          </a:p>
-        </p:txBody>
-      </p:sp>
-      <p:sp>
-        <p:nvSpPr>
-          <p:cNvPr id="14" name="TextBox 13"/>
+          <p:cNvPr id="12" name="번호 2"/>
           <p:cNvSpPr txBox="1"/>
           <p:nvPr/>
         </p:nvSpPr>
         <p:spPr>
           <a:xfrm>
-            <a:off x="1508760" y="3977639"/>
-            <a:ext cx="2743200" cy="914400"/>
+            <a:off x="731519" y="3154680"/>
+            <a:ext cx="914400" cy="548640"/>
           </a:xfrm>
           <a:prstGeom prst="rect">
             <a:avLst/>
@@ -5031,26 +5209,26 @@
               </a:lnSpc>
             </a:pPr>
             <a:r>
-              <a:rPr sz="1800" b="1" i="0">
-                <a:solidFill>
-                  <a:srgbClr val="253A41"/>
+              <a:rPr sz="2400" b="1" i="0">
+                <a:solidFill>
+                  <a:srgbClr val="98CFE1"/>
                 </a:solidFill>
               </a:rPr>
-              <a:t>약속 3</a:t>
-            </a:r>
-          </a:p>
-        </p:txBody>
-      </p:sp>
-      <p:sp>
-        <p:nvSpPr>
-          <p:cNvPr id="15" name="TextBox 14"/>
+              <a:t>02</a:t>
+            </a:r>
+          </a:p>
+        </p:txBody>
+      </p:sp>
+      <p:sp>
+        <p:nvSpPr>
+          <p:cNvPr id="13" name="TextBox 12"/>
           <p:cNvSpPr txBox="1"/>
           <p:nvPr/>
         </p:nvSpPr>
         <p:spPr>
           <a:xfrm>
-            <a:off x="4297680" y="3977639"/>
-            <a:ext cx="7071055" cy="914400"/>
+            <a:off x="1508760" y="2971800"/>
+            <a:ext cx="2743200" cy="914400"/>
           </a:xfrm>
           <a:prstGeom prst="rect">
             <a:avLst/>
@@ -5069,9 +5247,194 @@
               </a:lnSpc>
             </a:pPr>
             <a:r>
+              <a:rPr sz="1800" b="1" i="0">
+                <a:solidFill>
+                  <a:srgbClr val="274149"/>
+                </a:solidFill>
+              </a:rPr>
+              <a:t>약속 2</a:t>
+            </a:r>
+          </a:p>
+        </p:txBody>
+      </p:sp>
+      <p:sp>
+        <p:nvSpPr>
+          <p:cNvPr id="14" name="TextBox 13"/>
+          <p:cNvSpPr txBox="1"/>
+          <p:nvPr/>
+        </p:nvSpPr>
+        <p:spPr>
+          <a:xfrm>
+            <a:off x="4297680" y="2971800"/>
+            <a:ext cx="7071055" cy="914400"/>
+          </a:xfrm>
+          <a:prstGeom prst="rect">
+            <a:avLst/>
+          </a:prstGeom>
+          <a:noFill/>
+        </p:spPr>
+        <p:txBody>
+          <a:bodyPr wrap="square" lIns="54864" rIns="54864" tIns="27432" bIns="27432" anchor="ctr">
+            <a:noAutofit/>
+          </a:bodyPr>
+          <a:lstStyle/>
+          <a:p>
+            <a:pPr algn="l">
+              <a:lnSpc>
+                <a:spcPct val="115000"/>
+              </a:lnSpc>
+            </a:pPr>
+            <a:r>
               <a:rPr sz="1700" b="0" i="0">
                 <a:solidFill>
-                  <a:srgbClr val="2B2B2B"/>
+                  <a:srgbClr val="26231F"/>
+                </a:solidFill>
+              </a:rPr>
+              <a:t>화가 나도 잠자리 전엔 풀기</a:t>
+            </a:r>
+          </a:p>
+        </p:txBody>
+      </p:sp>
+      <p:sp>
+        <p:nvSpPr>
+          <p:cNvPr id="15" name="줄 3"/>
+          <p:cNvSpPr/>
+          <p:nvPr/>
+        </p:nvSpPr>
+        <p:spPr>
+          <a:xfrm>
+            <a:off x="640080" y="4069080"/>
+            <a:ext cx="10911535" cy="1005840"/>
+          </a:xfrm>
+          <a:prstGeom prst="roundRect">
+            <a:avLst>
+              <a:gd name="adj" fmla="val 7000"/>
+            </a:avLst>
+          </a:prstGeom>
+          <a:solidFill>
+            <a:srgbClr val="FFFFFF"/>
+          </a:solidFill>
+          <a:ln w="12700">
+            <a:solidFill>
+              <a:srgbClr val="ADDBEB"/>
+            </a:solidFill>
+          </a:ln>
+        </p:spPr>
+        <p:txBody>
+          <a:bodyPr rtlCol="0" anchor="ctr"/>
+          <a:lstStyle/>
+          <a:p>
+            <a:pPr algn="ctr"/>
+          </a:p>
+        </p:txBody>
+      </p:sp>
+      <p:sp>
+        <p:nvSpPr>
+          <p:cNvPr id="16" name="번호 3"/>
+          <p:cNvSpPr txBox="1"/>
+          <p:nvPr/>
+        </p:nvSpPr>
+        <p:spPr>
+          <a:xfrm>
+            <a:off x="731519" y="4297680"/>
+            <a:ext cx="914400" cy="548640"/>
+          </a:xfrm>
+          <a:prstGeom prst="rect">
+            <a:avLst/>
+          </a:prstGeom>
+          <a:noFill/>
+        </p:spPr>
+        <p:txBody>
+          <a:bodyPr wrap="square" lIns="54864" rIns="54864" tIns="27432" bIns="27432" anchor="ctr">
+            <a:noAutofit/>
+          </a:bodyPr>
+          <a:lstStyle/>
+          <a:p>
+            <a:pPr algn="l">
+              <a:lnSpc>
+                <a:spcPct val="115000"/>
+              </a:lnSpc>
+            </a:pPr>
+            <a:r>
+              <a:rPr sz="2400" b="1" i="0">
+                <a:solidFill>
+                  <a:srgbClr val="98CFE1"/>
+                </a:solidFill>
+              </a:rPr>
+              <a:t>03</a:t>
+            </a:r>
+          </a:p>
+        </p:txBody>
+      </p:sp>
+      <p:sp>
+        <p:nvSpPr>
+          <p:cNvPr id="17" name="TextBox 16"/>
+          <p:cNvSpPr txBox="1"/>
+          <p:nvPr/>
+        </p:nvSpPr>
+        <p:spPr>
+          <a:xfrm>
+            <a:off x="1508760" y="4114800"/>
+            <a:ext cx="2743200" cy="914400"/>
+          </a:xfrm>
+          <a:prstGeom prst="rect">
+            <a:avLst/>
+          </a:prstGeom>
+          <a:noFill/>
+        </p:spPr>
+        <p:txBody>
+          <a:bodyPr wrap="square" lIns="54864" rIns="54864" tIns="27432" bIns="27432" anchor="ctr">
+            <a:noAutofit/>
+          </a:bodyPr>
+          <a:lstStyle/>
+          <a:p>
+            <a:pPr algn="l">
+              <a:lnSpc>
+                <a:spcPct val="115000"/>
+              </a:lnSpc>
+            </a:pPr>
+            <a:r>
+              <a:rPr sz="1800" b="1" i="0">
+                <a:solidFill>
+                  <a:srgbClr val="274149"/>
+                </a:solidFill>
+              </a:rPr>
+              <a:t>약속 3</a:t>
+            </a:r>
+          </a:p>
+        </p:txBody>
+      </p:sp>
+      <p:sp>
+        <p:nvSpPr>
+          <p:cNvPr id="18" name="TextBox 17"/>
+          <p:cNvSpPr txBox="1"/>
+          <p:nvPr/>
+        </p:nvSpPr>
+        <p:spPr>
+          <a:xfrm>
+            <a:off x="4297680" y="4114800"/>
+            <a:ext cx="7071055" cy="914400"/>
+          </a:xfrm>
+          <a:prstGeom prst="rect">
+            <a:avLst/>
+          </a:prstGeom>
+          <a:noFill/>
+        </p:spPr>
+        <p:txBody>
+          <a:bodyPr wrap="square" lIns="54864" rIns="54864" tIns="27432" bIns="27432" anchor="ctr">
+            <a:noAutofit/>
+          </a:bodyPr>
+          <a:lstStyle/>
+          <a:p>
+            <a:pPr algn="l">
+              <a:lnSpc>
+                <a:spcPct val="115000"/>
+              </a:lnSpc>
+            </a:pPr>
+            <a:r>
+              <a:rPr sz="1700" b="0" i="0">
+                <a:solidFill>
+                  <a:srgbClr val="26231F"/>
                 </a:solidFill>
               </a:rPr>
               <a:t>한 달에 한 번 데이트하기</a:t>
@@ -5113,14 +5476,14 @@
         </p:nvSpPr>
         <p:spPr>
           <a:xfrm>
-            <a:off x="0" y="384048"/>
-            <a:ext cx="9509522" cy="896112"/>
-          </a:xfrm>
-          <a:prstGeom prst="homePlate">
+            <a:off x="0" y="6565392"/>
+            <a:ext cx="12191695" cy="292608"/>
+          </a:xfrm>
+          <a:prstGeom prst="rect">
             <a:avLst/>
           </a:prstGeom>
           <a:solidFill>
-            <a:srgbClr val="497483"/>
+            <a:srgbClr val="ADDBEB"/>
           </a:solidFill>
           <a:ln>
             <a:noFill/>
@@ -5136,19 +5499,77 @@
       </p:sp>
       <p:sp>
         <p:nvSpPr>
-          <p:cNvPr id="2" name="Title 1"/>
-          <p:cNvSpPr>
-            <a:spLocks noGrp="1"/>
-          </p:cNvSpPr>
-          <p:nvPr>
-            <p:ph type="title"/>
-          </p:nvPr>
-        </p:nvSpPr>
-        <p:spPr>
-          <a:xfrm>
-            <a:off x="640080" y="411480"/>
-            <a:ext cx="8412242" cy="822960"/>
-          </a:xfrm>
+          <p:cNvPr id="4" name="포인트"/>
+          <p:cNvSpPr/>
+          <p:nvPr/>
+        </p:nvSpPr>
+        <p:spPr>
+          <a:xfrm>
+            <a:off x="5958687" y="246888"/>
+            <a:ext cx="274320" cy="274320"/>
+          </a:xfrm>
+          <a:prstGeom prst="round2SameRect">
+            <a:avLst/>
+          </a:prstGeom>
+          <a:solidFill>
+            <a:srgbClr val="98CFE1"/>
+          </a:solidFill>
+          <a:ln>
+            <a:noFill/>
+          </a:ln>
+        </p:spPr>
+        <p:txBody>
+          <a:bodyPr rtlCol="0" anchor="ctr"/>
+          <a:lstStyle/>
+          <a:p>
+            <a:pPr algn="ctr"/>
+          </a:p>
+        </p:txBody>
+      </p:sp>
+      <p:sp>
+        <p:nvSpPr>
+          <p:cNvPr id="5" name="장식"/>
+          <p:cNvSpPr/>
+          <p:nvPr/>
+        </p:nvSpPr>
+        <p:spPr>
+          <a:xfrm>
+            <a:off x="5684367" y="1572768"/>
+            <a:ext cx="822960" cy="22860"/>
+          </a:xfrm>
+          <a:prstGeom prst="rect">
+            <a:avLst/>
+          </a:prstGeom>
+          <a:solidFill>
+            <a:srgbClr val="98CFE1"/>
+          </a:solidFill>
+          <a:ln>
+            <a:noFill/>
+          </a:ln>
+        </p:spPr>
+        <p:txBody>
+          <a:bodyPr rtlCol="0" anchor="ctr"/>
+          <a:lstStyle/>
+          <a:p>
+            <a:pPr algn="ctr"/>
+          </a:p>
+        </p:txBody>
+      </p:sp>
+      <p:sp>
+        <p:nvSpPr>
+          <p:cNvPr id="6" name="상단 라벨"/>
+          <p:cNvSpPr txBox="1"/>
+          <p:nvPr/>
+        </p:nvSpPr>
+        <p:spPr>
+          <a:xfrm>
+            <a:off x="640080" y="182880"/>
+            <a:ext cx="3657600" cy="274320"/>
+          </a:xfrm>
+          <a:prstGeom prst="rect">
+            <a:avLst/>
+          </a:prstGeom>
+          <a:noFill/>
         </p:spPr>
         <p:txBody>
           <a:bodyPr wrap="square" lIns="54864" rIns="54864" tIns="27432" bIns="27432" anchor="ctr">
@@ -5157,6 +5578,44 @@
           <a:lstStyle/>
           <a:p>
             <a:pPr algn="l">
+              <a:lnSpc>
+                <a:spcPct val="115000"/>
+              </a:lnSpc>
+            </a:pPr>
+            <a:r>
+              <a:rPr sz="800" b="1" i="0" spc="250">
+                <a:solidFill>
+                  <a:srgbClr val="8E8780"/>
+                </a:solidFill>
+              </a:rPr>
+              <a:t>FAMILY ALBUM</a:t>
+            </a:r>
+          </a:p>
+        </p:txBody>
+      </p:sp>
+      <p:sp>
+        <p:nvSpPr>
+          <p:cNvPr id="2" name="Title 1"/>
+          <p:cNvSpPr>
+            <a:spLocks noGrp="1"/>
+          </p:cNvSpPr>
+          <p:nvPr>
+            <p:ph type="title"/>
+          </p:nvPr>
+        </p:nvSpPr>
+        <p:spPr>
+          <a:xfrm>
+            <a:off x="1371600" y="640080"/>
+            <a:ext cx="9448495" cy="868680"/>
+          </a:xfrm>
+        </p:spPr>
+        <p:txBody>
+          <a:bodyPr wrap="square" lIns="54864" rIns="54864" tIns="27432" bIns="27432" anchor="ctr">
+            <a:noAutofit/>
+          </a:bodyPr>
+          <a:lstStyle/>
+          <a:p>
+            <a:pPr algn="ctr">
               <a:lnSpc>
                 <a:spcPct val="105000"/>
               </a:lnSpc>
@@ -5164,7 +5623,7 @@
             <a:r>
               <a:rPr sz="3000" b="1" i="0">
                 <a:solidFill>
-                  <a:srgbClr val="FFFFFF"/>
+                  <a:srgbClr val="26231F"/>
                 </a:solidFill>
               </a:rPr>
               <a:t>가족 사진</a:t>
@@ -5174,14 +5633,14 @@
       </p:sp>
       <p:sp>
         <p:nvSpPr>
-          <p:cNvPr id="4" name="사진 자리"/>
+          <p:cNvPr id="7" name="사진 자리"/>
           <p:cNvSpPr/>
           <p:nvPr/>
         </p:nvSpPr>
         <p:spPr>
           <a:xfrm>
-            <a:off x="640080" y="1645920"/>
-            <a:ext cx="3515258" cy="2286000"/>
+            <a:off x="640080" y="1783080"/>
+            <a:ext cx="3515258" cy="2103120"/>
           </a:xfrm>
           <a:prstGeom prst="roundRect">
             <a:avLst>
@@ -5189,12 +5648,10 @@
             </a:avLst>
           </a:prstGeom>
           <a:solidFill>
-            <a:srgbClr val="D6E5EA"/>
+            <a:srgbClr val="D5EEF6"/>
           </a:solidFill>
           <a:ln w="19050">
-            <a:solidFill>
-              <a:srgbClr val="497483"/>
-            </a:solidFill>
+            <a:noFill/>
             <a:prstDash val="dash"/>
           </a:ln>
         </p:spPr>
@@ -5212,7 +5669,7 @@
             <a:r>
               <a:rPr sz="1200" b="0" i="0">
                 <a:solidFill>
-                  <a:srgbClr val="253A41"/>
+                  <a:srgbClr val="8E8780"/>
                 </a:solidFill>
               </a:rPr>
               <a:t>사진 1</a:t>
@@ -5222,14 +5679,14 @@
       </p:sp>
       <p:sp>
         <p:nvSpPr>
-          <p:cNvPr id="5" name="사진 자리"/>
+          <p:cNvPr id="8" name="사진 자리"/>
           <p:cNvSpPr/>
           <p:nvPr/>
         </p:nvSpPr>
         <p:spPr>
           <a:xfrm>
-            <a:off x="4338218" y="1645920"/>
-            <a:ext cx="3515258" cy="2286000"/>
+            <a:off x="4338218" y="1783080"/>
+            <a:ext cx="3515258" cy="2103120"/>
           </a:xfrm>
           <a:prstGeom prst="roundRect">
             <a:avLst>
@@ -5237,12 +5694,10 @@
             </a:avLst>
           </a:prstGeom>
           <a:solidFill>
-            <a:srgbClr val="D6E5EA"/>
+            <a:srgbClr val="D5EEF6"/>
           </a:solidFill>
           <a:ln w="19050">
-            <a:solidFill>
-              <a:srgbClr val="497483"/>
-            </a:solidFill>
+            <a:noFill/>
             <a:prstDash val="dash"/>
           </a:ln>
         </p:spPr>
@@ -5260,7 +5715,7 @@
             <a:r>
               <a:rPr sz="1200" b="0" i="0">
                 <a:solidFill>
-                  <a:srgbClr val="253A41"/>
+                  <a:srgbClr val="8E8780"/>
                 </a:solidFill>
               </a:rPr>
               <a:t>사진 2</a:t>
@@ -5270,14 +5725,14 @@
       </p:sp>
       <p:sp>
         <p:nvSpPr>
-          <p:cNvPr id="6" name="사진 자리"/>
+          <p:cNvPr id="9" name="사진 자리"/>
           <p:cNvSpPr/>
           <p:nvPr/>
         </p:nvSpPr>
         <p:spPr>
           <a:xfrm>
-            <a:off x="8036356" y="1645920"/>
-            <a:ext cx="3515258" cy="2286000"/>
+            <a:off x="8036356" y="1783080"/>
+            <a:ext cx="3515258" cy="2103120"/>
           </a:xfrm>
           <a:prstGeom prst="roundRect">
             <a:avLst>
@@ -5285,12 +5740,10 @@
             </a:avLst>
           </a:prstGeom>
           <a:solidFill>
-            <a:srgbClr val="D6E5EA"/>
+            <a:srgbClr val="D5EEF6"/>
           </a:solidFill>
           <a:ln w="19050">
-            <a:solidFill>
-              <a:srgbClr val="497483"/>
-            </a:solidFill>
+            <a:noFill/>
             <a:prstDash val="dash"/>
           </a:ln>
         </p:spPr>
@@ -5308,7 +5761,7 @@
             <a:r>
               <a:rPr sz="1200" b="0" i="0">
                 <a:solidFill>
-                  <a:srgbClr val="253A41"/>
+                  <a:srgbClr val="8E8780"/>
                 </a:solidFill>
               </a:rPr>
               <a:t>사진 3</a:t>
@@ -5318,14 +5771,14 @@
       </p:sp>
       <p:sp>
         <p:nvSpPr>
-          <p:cNvPr id="7" name="사진 자리"/>
+          <p:cNvPr id="10" name="사진 자리"/>
           <p:cNvSpPr/>
           <p:nvPr/>
         </p:nvSpPr>
         <p:spPr>
           <a:xfrm>
-            <a:off x="640080" y="4114800"/>
-            <a:ext cx="3515258" cy="2286000"/>
+            <a:off x="640080" y="4069080"/>
+            <a:ext cx="3515258" cy="2103120"/>
           </a:xfrm>
           <a:prstGeom prst="roundRect">
             <a:avLst>
@@ -5333,12 +5786,10 @@
             </a:avLst>
           </a:prstGeom>
           <a:solidFill>
-            <a:srgbClr val="D6E5EA"/>
+            <a:srgbClr val="D5EEF6"/>
           </a:solidFill>
           <a:ln w="19050">
-            <a:solidFill>
-              <a:srgbClr val="497483"/>
-            </a:solidFill>
+            <a:noFill/>
             <a:prstDash val="dash"/>
           </a:ln>
         </p:spPr>
@@ -5356,7 +5807,7 @@
             <a:r>
               <a:rPr sz="1200" b="0" i="0">
                 <a:solidFill>
-                  <a:srgbClr val="253A41"/>
+                  <a:srgbClr val="8E8780"/>
                 </a:solidFill>
               </a:rPr>
               <a:t>사진 4</a:t>
@@ -5366,14 +5817,14 @@
       </p:sp>
       <p:sp>
         <p:nvSpPr>
-          <p:cNvPr id="8" name="사진 자리"/>
+          <p:cNvPr id="11" name="사진 자리"/>
           <p:cNvSpPr/>
           <p:nvPr/>
         </p:nvSpPr>
         <p:spPr>
           <a:xfrm>
-            <a:off x="4338218" y="4114800"/>
-            <a:ext cx="3515258" cy="2286000"/>
+            <a:off x="4338218" y="4069080"/>
+            <a:ext cx="3515258" cy="2103120"/>
           </a:xfrm>
           <a:prstGeom prst="roundRect">
             <a:avLst>
@@ -5381,12 +5832,10 @@
             </a:avLst>
           </a:prstGeom>
           <a:solidFill>
-            <a:srgbClr val="D6E5EA"/>
+            <a:srgbClr val="D5EEF6"/>
           </a:solidFill>
           <a:ln w="19050">
-            <a:solidFill>
-              <a:srgbClr val="497483"/>
-            </a:solidFill>
+            <a:noFill/>
             <a:prstDash val="dash"/>
           </a:ln>
         </p:spPr>
@@ -5404,7 +5853,7 @@
             <a:r>
               <a:rPr sz="1200" b="0" i="0">
                 <a:solidFill>
-                  <a:srgbClr val="253A41"/>
+                  <a:srgbClr val="8E8780"/>
                 </a:solidFill>
               </a:rPr>
               <a:t>사진 5</a:t>
@@ -5414,14 +5863,14 @@
       </p:sp>
       <p:sp>
         <p:nvSpPr>
-          <p:cNvPr id="9" name="사진 자리"/>
+          <p:cNvPr id="12" name="사진 자리"/>
           <p:cNvSpPr/>
           <p:nvPr/>
         </p:nvSpPr>
         <p:spPr>
           <a:xfrm>
-            <a:off x="8036356" y="4114800"/>
-            <a:ext cx="3515258" cy="2286000"/>
+            <a:off x="8036356" y="4069080"/>
+            <a:ext cx="3515258" cy="2103120"/>
           </a:xfrm>
           <a:prstGeom prst="roundRect">
             <a:avLst>
@@ -5429,12 +5878,10 @@
             </a:avLst>
           </a:prstGeom>
           <a:solidFill>
-            <a:srgbClr val="D6E5EA"/>
+            <a:srgbClr val="D5EEF6"/>
           </a:solidFill>
           <a:ln w="19050">
-            <a:solidFill>
-              <a:srgbClr val="497483"/>
-            </a:solidFill>
+            <a:noFill/>
             <a:prstDash val="dash"/>
           </a:ln>
         </p:spPr>
@@ -5452,7 +5899,7 @@
             <a:r>
               <a:rPr sz="1200" b="0" i="0">
                 <a:solidFill>
-                  <a:srgbClr val="253A41"/>
+                  <a:srgbClr val="8E8780"/>
                 </a:solidFill>
               </a:rPr>
               <a:t>사진 6</a:t>
@@ -5471,6 +5918,14 @@
 <file path=ppt/slides/slide6.xml><?xml version="1.0" encoding="utf-8"?>
 <p:sld xmlns:a="http://schemas.openxmlformats.org/drawingml/2006/main" xmlns:p="http://schemas.openxmlformats.org/presentationml/2006/main" xmlns:r="http://schemas.openxmlformats.org/officeDocument/2006/relationships">
   <p:cSld>
+    <p:bg>
+      <p:bgPr>
+        <a:solidFill>
+          <a:srgbClr val="D5EEF6"/>
+        </a:solidFill>
+        <a:effectLst/>
+      </p:bgPr>
+    </p:bg>
     <p:spTree>
       <p:nvGrpSpPr>
         <p:cNvPr id="1" name=""/>
@@ -5478,30 +5933,116 @@
         <p:nvPr/>
       </p:nvGrpSpPr>
       <p:grpSpPr/>
-      <p:pic>
-        <p:nvPicPr>
-          <p:cNvPr id="3" name="표지 그림" descr="family-46.jpg"/>
-          <p:cNvPicPr>
-            <a:picLocks noChangeAspect="1"/>
-          </p:cNvPicPr>
-          <p:nvPr/>
-        </p:nvPicPr>
-        <p:blipFill>
-          <a:blip r:embed="rId2"/>
-          <a:stretch>
-            <a:fillRect/>
-          </a:stretch>
-        </p:blipFill>
-        <p:spPr>
-          <a:xfrm>
-            <a:off x="0" y="0"/>
-            <a:ext cx="12191695" cy="6858000"/>
+      <p:sp>
+        <p:nvSpPr>
+          <p:cNvPr id="3" name="사진 자리"/>
+          <p:cNvSpPr/>
+          <p:nvPr/>
+        </p:nvSpPr>
+        <p:spPr>
+          <a:xfrm>
+            <a:off x="7802684" y="0"/>
+            <a:ext cx="4389010" cy="6858000"/>
           </a:xfrm>
           <a:prstGeom prst="rect">
             <a:avLst/>
           </a:prstGeom>
-        </p:spPr>
-      </p:pic>
+          <a:solidFill>
+            <a:srgbClr val="ADDBEB"/>
+          </a:solidFill>
+          <a:ln>
+            <a:noFill/>
+          </a:ln>
+        </p:spPr>
+        <p:txBody>
+          <a:bodyPr rtlCol="0" anchor="ctr" wrap="square" lIns="54864" rIns="54864" tIns="27432" bIns="27432">
+            <a:noAutofit/>
+          </a:bodyPr>
+          <a:lstStyle/>
+          <a:p>
+            <a:pPr algn="ctr">
+              <a:lnSpc>
+                <a:spcPct val="100000"/>
+              </a:lnSpc>
+            </a:pPr>
+            <a:r>
+              <a:rPr sz="1400" b="0" i="0">
+                <a:solidFill>
+                  <a:srgbClr val="274149"/>
+                </a:solidFill>
+              </a:rPr>
+              <a:t>사진을 넣어 주세요</a:t>
+            </a:r>
+          </a:p>
+        </p:txBody>
+      </p:sp>
+      <p:sp>
+        <p:nvSpPr>
+          <p:cNvPr id="4" name="장식"/>
+          <p:cNvSpPr/>
+          <p:nvPr/>
+        </p:nvSpPr>
+        <p:spPr>
+          <a:xfrm>
+            <a:off x="8168435" y="365760"/>
+            <a:ext cx="3657508" cy="6126480"/>
+          </a:xfrm>
+          <a:prstGeom prst="rect">
+            <a:avLst/>
+          </a:prstGeom>
+          <a:noFill/>
+          <a:ln w="9525">
+            <a:solidFill>
+              <a:srgbClr val="26231F"/>
+            </a:solidFill>
+          </a:ln>
+        </p:spPr>
+        <p:txBody>
+          <a:bodyPr rtlCol="0" anchor="ctr"/>
+          <a:lstStyle/>
+          <a:p>
+            <a:pPr algn="ctr"/>
+          </a:p>
+        </p:txBody>
+      </p:sp>
+      <p:sp>
+        <p:nvSpPr>
+          <p:cNvPr id="5" name="라벨"/>
+          <p:cNvSpPr txBox="1"/>
+          <p:nvPr/>
+        </p:nvSpPr>
+        <p:spPr>
+          <a:xfrm>
+            <a:off x="822960" y="2148840"/>
+            <a:ext cx="5608179" cy="274320"/>
+          </a:xfrm>
+          <a:prstGeom prst="rect">
+            <a:avLst/>
+          </a:prstGeom>
+          <a:noFill/>
+        </p:spPr>
+        <p:txBody>
+          <a:bodyPr wrap="square" lIns="54864" rIns="54864" tIns="27432" bIns="27432" anchor="t">
+            <a:noAutofit/>
+          </a:bodyPr>
+          <a:lstStyle/>
+          <a:p>
+            <a:pPr algn="l">
+              <a:lnSpc>
+                <a:spcPct val="115000"/>
+              </a:lnSpc>
+            </a:pPr>
+            <a:r>
+              <a:rPr sz="1000" b="1" i="0" spc="250">
+                <a:solidFill>
+                  <a:srgbClr val="26231F"/>
+                </a:solidFill>
+              </a:rPr>
+              <a:t>FAMILY ALBUM</a:t>
+            </a:r>
+          </a:p>
+        </p:txBody>
+      </p:sp>
       <p:sp>
         <p:nvSpPr>
           <p:cNvPr id="2" name="Title 1"/>
@@ -5514,8 +6055,8 @@
         </p:nvSpPr>
         <p:spPr>
           <a:xfrm>
-            <a:off x="853418" y="2057400"/>
-            <a:ext cx="6095847" cy="1554480"/>
+            <a:off x="822960" y="2606040"/>
+            <a:ext cx="5608179" cy="1188720"/>
           </a:xfrm>
         </p:spPr>
         <p:txBody>
@@ -5530,9 +6071,9 @@
               </a:lnSpc>
             </a:pPr>
             <a:r>
-              <a:rPr sz="3600" b="1" i="0">
-                <a:solidFill>
-                  <a:srgbClr val="253A41"/>
+              <a:rPr sz="4000" b="1" i="0">
+                <a:solidFill>
+                  <a:srgbClr val="26231F"/>
                 </a:solidFill>
               </a:rPr>
               <a:t>우리 가족 소개를 마칩니다</a:t>
@@ -5542,14 +6083,14 @@
       </p:sp>
       <p:sp>
         <p:nvSpPr>
-          <p:cNvPr id="4" name="한 줄 문구"/>
+          <p:cNvPr id="6" name="한 줄 문구"/>
           <p:cNvSpPr txBox="1"/>
           <p:nvPr/>
         </p:nvSpPr>
         <p:spPr>
           <a:xfrm>
-            <a:off x="853418" y="3749039"/>
-            <a:ext cx="6095847" cy="822960"/>
+            <a:off x="822960" y="3886200"/>
+            <a:ext cx="5608179" cy="822960"/>
           </a:xfrm>
           <a:prstGeom prst="rect">
             <a:avLst/>
@@ -5568,9 +6109,9 @@
               </a:lnSpc>
             </a:pPr>
             <a:r>
-              <a:rPr sz="1700" b="0" i="1">
-                <a:solidFill>
-                  <a:srgbClr val="253A41"/>
+              <a:rPr sz="1700" b="0" i="0">
+                <a:solidFill>
+                  <a:srgbClr val="26231F"/>
                 </a:solidFill>
               </a:rPr>
               <a:t>읽어 주셔서 고맙습니다</a:t>
@@ -5580,14 +6121,14 @@
       </p:sp>
       <p:sp>
         <p:nvSpPr>
-          <p:cNvPr id="5" name="안내 문구"/>
+          <p:cNvPr id="7" name="안내 문구"/>
           <p:cNvSpPr txBox="1"/>
           <p:nvPr/>
         </p:nvSpPr>
         <p:spPr>
           <a:xfrm>
-            <a:off x="853418" y="4617720"/>
-            <a:ext cx="6095847" cy="914400"/>
+            <a:off x="822960" y="4754880"/>
+            <a:ext cx="5608179" cy="914400"/>
           </a:xfrm>
           <a:prstGeom prst="rect">
             <a:avLst/>
@@ -5608,7 +6149,7 @@
             <a:r>
               <a:rPr sz="1400" b="0" i="0">
                 <a:solidFill>
-                  <a:srgbClr val="666666"/>
+                  <a:srgbClr val="26231F"/>
                 </a:solidFill>
               </a:rPr>
               <a:t>고맙습니다 · 가족 이름</a:t>
@@ -5635,34 +6176,34 @@
         <a:sysClr val="window" lastClr="FFFFFF"/>
       </a:lt1>
       <a:dk2>
-        <a:srgbClr val="253A41"/>
+        <a:srgbClr val="274149"/>
       </a:dk2>
       <a:lt2>
-        <a:srgbClr val="F2F6F8"/>
+        <a:srgbClr val="ECF7FB"/>
       </a:lt2>
       <a:accent1>
-        <a:srgbClr val="497483"/>
+        <a:srgbClr val="98CFE1"/>
       </a:accent1>
       <a:accent2>
-        <a:srgbClr val="834958"/>
+        <a:srgbClr val="B8C6EA"/>
       </a:accent2>
       <a:accent3>
-        <a:srgbClr val="253A41"/>
+        <a:srgbClr val="274149"/>
       </a:accent3>
       <a:accent4>
-        <a:srgbClr val="D6E5EA"/>
+        <a:srgbClr val="D5EEF6"/>
       </a:accent4>
       <a:accent5>
-        <a:srgbClr val="665E6E"/>
+        <a:srgbClr val="A8CAE6"/>
       </a:accent5>
       <a:accent6>
-        <a:srgbClr val="7C898D"/>
+        <a:srgbClr val="7D8D92"/>
       </a:accent6>
       <a:hlink>
-        <a:srgbClr val="497483"/>
+        <a:srgbClr val="98CFE1"/>
       </a:hlink>
       <a:folHlink>
-        <a:srgbClr val="253A41"/>
+        <a:srgbClr val="274149"/>
       </a:folHlink>
     </a:clrScheme>
     <a:fontScheme name="Office">
